--- a/tests/fixtures/templates/技術報告_スタンダード水色_全レイアウト見本.pptx
+++ b/tests/fixtures/templates/技術報告_スタンダード水色_全レイアウト見本.pptx
@@ -460,6 +460,36 @@
                 <a:ea typeface="Yu Gothic"/>
               </a:defRPr>
             </a:lvl1pPr>
+            <a:lvl2pPr algn="l" marL="0" indent="0">
+              <a:buNone/>
+              <a:defRPr sz="1050" b="0">
+                <a:solidFill>
+                  <a:srgbClr val="E8F4FA"/>
+                </a:solidFill>
+                <a:latin typeface="Yu Gothic"/>
+                <a:ea typeface="Yu Gothic"/>
+              </a:defRPr>
+            </a:lvl2pPr>
+            <a:lvl3pPr algn="l" marL="0" indent="0">
+              <a:buNone/>
+              <a:defRPr sz="900" b="0">
+                <a:solidFill>
+                  <a:srgbClr val="E8F4FA"/>
+                </a:solidFill>
+                <a:latin typeface="Yu Gothic"/>
+                <a:ea typeface="Yu Gothic"/>
+              </a:defRPr>
+            </a:lvl3pPr>
+            <a:lvl4pPr algn="l" marL="0" indent="0">
+              <a:buNone/>
+              <a:defRPr sz="750" b="0">
+                <a:solidFill>
+                  <a:srgbClr val="E8F4FA"/>
+                </a:solidFill>
+                <a:latin typeface="Yu Gothic"/>
+                <a:ea typeface="Yu Gothic"/>
+              </a:defRPr>
+            </a:lvl4pPr>
           </a:lstStyle>
           <a:p>
             <a:r>
@@ -703,6 +733,36 @@
                 <a:ea typeface="Yu Gothic"/>
               </a:defRPr>
             </a:lvl1pPr>
+            <a:lvl2pPr algn="l" marL="0" indent="0">
+              <a:buNone/>
+              <a:defRPr sz="1050" b="0">
+                <a:solidFill>
+                  <a:srgbClr val="D6E9F2"/>
+                </a:solidFill>
+                <a:latin typeface="Consolas"/>
+                <a:ea typeface="Yu Gothic"/>
+              </a:defRPr>
+            </a:lvl2pPr>
+            <a:lvl3pPr algn="l" marL="0" indent="0">
+              <a:buNone/>
+              <a:defRPr sz="900" b="0">
+                <a:solidFill>
+                  <a:srgbClr val="D6E9F2"/>
+                </a:solidFill>
+                <a:latin typeface="Consolas"/>
+                <a:ea typeface="Yu Gothic"/>
+              </a:defRPr>
+            </a:lvl3pPr>
+            <a:lvl4pPr algn="l" marL="0" indent="0">
+              <a:buNone/>
+              <a:defRPr sz="750" b="0">
+                <a:solidFill>
+                  <a:srgbClr val="D6E9F2"/>
+                </a:solidFill>
+                <a:latin typeface="Consolas"/>
+                <a:ea typeface="Yu Gothic"/>
+              </a:defRPr>
+            </a:lvl4pPr>
           </a:lstStyle>
           <a:p>
             <a:r>
@@ -741,6 +801,36 @@
                 <a:ea typeface="Yu Gothic"/>
               </a:defRPr>
             </a:lvl1pPr>
+            <a:lvl2pPr algn="l" marL="0" indent="0">
+              <a:buNone/>
+              <a:defRPr sz="950" b="0">
+                <a:solidFill>
+                  <a:srgbClr val="5A6B75"/>
+                </a:solidFill>
+                <a:latin typeface="Yu Gothic"/>
+                <a:ea typeface="Yu Gothic"/>
+              </a:defRPr>
+            </a:lvl2pPr>
+            <a:lvl3pPr algn="l" marL="0" indent="0">
+              <a:buNone/>
+              <a:defRPr sz="850" b="0">
+                <a:solidFill>
+                  <a:srgbClr val="5A6B75"/>
+                </a:solidFill>
+                <a:latin typeface="Yu Gothic"/>
+                <a:ea typeface="Yu Gothic"/>
+              </a:defRPr>
+            </a:lvl3pPr>
+            <a:lvl4pPr algn="l" marL="0" indent="0">
+              <a:buNone/>
+              <a:defRPr sz="700" b="0">
+                <a:solidFill>
+                  <a:srgbClr val="5A6B75"/>
+                </a:solidFill>
+                <a:latin typeface="Yu Gothic"/>
+                <a:ea typeface="Yu Gothic"/>
+              </a:defRPr>
+            </a:lvl4pPr>
           </a:lstStyle>
           <a:p>
             <a:r>
@@ -892,6 +982,20 @@
                 </a:solidFill>
               </a:defRPr>
             </a:lvl1pPr>
+            <a:lvl2pPr algn="l">
+              <a:defRPr sz="1750" b="0">
+                <a:solidFill>
+                  <a:srgbClr val="1A1A1A"/>
+                </a:solidFill>
+              </a:defRPr>
+            </a:lvl2pPr>
+            <a:lvl3pPr algn="l">
+              <a:defRPr sz="1500" b="0">
+                <a:solidFill>
+                  <a:srgbClr val="1A1A1A"/>
+                </a:solidFill>
+              </a:defRPr>
+            </a:lvl3pPr>
           </a:lstStyle>
           <a:p>
             <a:pPr lvl="0"/>
@@ -1387,6 +1491,39 @@
                 <a:cs typeface="Yu Gothic"/>
               </a:defRPr>
             </a:lvl1pPr>
+            <a:lvl2pPr algn="ctr" marL="0" indent="0">
+              <a:buNone/>
+              <a:defRPr sz="1250" b="1">
+                <a:solidFill>
+                  <a:srgbClr val="5A6B75"/>
+                </a:solidFill>
+                <a:latin typeface="Yu Gothic"/>
+                <a:ea typeface="Yu Gothic"/>
+                <a:cs typeface="Yu Gothic"/>
+              </a:defRPr>
+            </a:lvl2pPr>
+            <a:lvl3pPr algn="ctr" marL="0" indent="0">
+              <a:buNone/>
+              <a:defRPr sz="1050" b="1">
+                <a:solidFill>
+                  <a:srgbClr val="5A6B75"/>
+                </a:solidFill>
+                <a:latin typeface="Yu Gothic"/>
+                <a:ea typeface="Yu Gothic"/>
+                <a:cs typeface="Yu Gothic"/>
+              </a:defRPr>
+            </a:lvl3pPr>
+            <a:lvl4pPr algn="ctr" marL="0" indent="0">
+              <a:buNone/>
+              <a:defRPr sz="900" b="1">
+                <a:solidFill>
+                  <a:srgbClr val="5A6B75"/>
+                </a:solidFill>
+                <a:latin typeface="Yu Gothic"/>
+                <a:ea typeface="Yu Gothic"/>
+                <a:cs typeface="Yu Gothic"/>
+              </a:defRPr>
+            </a:lvl4pPr>
           </a:lstStyle>
           <a:p>
             <a:r>
@@ -1465,6 +1602,39 @@
                 <a:cs typeface="Yu Gothic"/>
               </a:defRPr>
             </a:lvl1pPr>
+            <a:lvl2pPr algn="ctr" marL="0" indent="0">
+              <a:buNone/>
+              <a:defRPr sz="1050" b="0">
+                <a:solidFill>
+                  <a:srgbClr val="1A1A1A"/>
+                </a:solidFill>
+                <a:latin typeface="Yu Gothic"/>
+                <a:ea typeface="Yu Gothic"/>
+                <a:cs typeface="Yu Gothic"/>
+              </a:defRPr>
+            </a:lvl2pPr>
+            <a:lvl3pPr algn="ctr" marL="0" indent="0">
+              <a:buNone/>
+              <a:defRPr sz="900" b="0">
+                <a:solidFill>
+                  <a:srgbClr val="1A1A1A"/>
+                </a:solidFill>
+                <a:latin typeface="Yu Gothic"/>
+                <a:ea typeface="Yu Gothic"/>
+                <a:cs typeface="Yu Gothic"/>
+              </a:defRPr>
+            </a:lvl3pPr>
+            <a:lvl4pPr algn="ctr" marL="0" indent="0">
+              <a:buNone/>
+              <a:defRPr sz="750" b="0">
+                <a:solidFill>
+                  <a:srgbClr val="1A1A1A"/>
+                </a:solidFill>
+                <a:latin typeface="Yu Gothic"/>
+                <a:ea typeface="Yu Gothic"/>
+                <a:cs typeface="Yu Gothic"/>
+              </a:defRPr>
+            </a:lvl4pPr>
           </a:lstStyle>
           <a:p>
             <a:r>
@@ -1504,6 +1674,39 @@
                 <a:cs typeface="Yu Gothic"/>
               </a:defRPr>
             </a:lvl1pPr>
+            <a:lvl2pPr algn="ctr" marL="0" indent="0">
+              <a:buNone/>
+              <a:defRPr sz="1250" b="1">
+                <a:solidFill>
+                  <a:srgbClr val="5A6B75"/>
+                </a:solidFill>
+                <a:latin typeface="Yu Gothic"/>
+                <a:ea typeface="Yu Gothic"/>
+                <a:cs typeface="Yu Gothic"/>
+              </a:defRPr>
+            </a:lvl2pPr>
+            <a:lvl3pPr algn="ctr" marL="0" indent="0">
+              <a:buNone/>
+              <a:defRPr sz="1050" b="1">
+                <a:solidFill>
+                  <a:srgbClr val="5A6B75"/>
+                </a:solidFill>
+                <a:latin typeface="Yu Gothic"/>
+                <a:ea typeface="Yu Gothic"/>
+                <a:cs typeface="Yu Gothic"/>
+              </a:defRPr>
+            </a:lvl3pPr>
+            <a:lvl4pPr algn="ctr" marL="0" indent="0">
+              <a:buNone/>
+              <a:defRPr sz="900" b="1">
+                <a:solidFill>
+                  <a:srgbClr val="5A6B75"/>
+                </a:solidFill>
+                <a:latin typeface="Yu Gothic"/>
+                <a:ea typeface="Yu Gothic"/>
+                <a:cs typeface="Yu Gothic"/>
+              </a:defRPr>
+            </a:lvl4pPr>
           </a:lstStyle>
           <a:p>
             <a:r>
@@ -1582,6 +1785,39 @@
                 <a:cs typeface="Yu Gothic"/>
               </a:defRPr>
             </a:lvl1pPr>
+            <a:lvl2pPr algn="ctr" marL="0" indent="0">
+              <a:buNone/>
+              <a:defRPr sz="1050" b="0">
+                <a:solidFill>
+                  <a:srgbClr val="1A1A1A"/>
+                </a:solidFill>
+                <a:latin typeface="Yu Gothic"/>
+                <a:ea typeface="Yu Gothic"/>
+                <a:cs typeface="Yu Gothic"/>
+              </a:defRPr>
+            </a:lvl2pPr>
+            <a:lvl3pPr algn="ctr" marL="0" indent="0">
+              <a:buNone/>
+              <a:defRPr sz="900" b="0">
+                <a:solidFill>
+                  <a:srgbClr val="1A1A1A"/>
+                </a:solidFill>
+                <a:latin typeface="Yu Gothic"/>
+                <a:ea typeface="Yu Gothic"/>
+                <a:cs typeface="Yu Gothic"/>
+              </a:defRPr>
+            </a:lvl3pPr>
+            <a:lvl4pPr algn="ctr" marL="0" indent="0">
+              <a:buNone/>
+              <a:defRPr sz="750" b="0">
+                <a:solidFill>
+                  <a:srgbClr val="1A1A1A"/>
+                </a:solidFill>
+                <a:latin typeface="Yu Gothic"/>
+                <a:ea typeface="Yu Gothic"/>
+                <a:cs typeface="Yu Gothic"/>
+              </a:defRPr>
+            </a:lvl4pPr>
           </a:lstStyle>
           <a:p>
             <a:r>
@@ -1621,6 +1857,39 @@
                 <a:cs typeface="Yu Gothic"/>
               </a:defRPr>
             </a:lvl1pPr>
+            <a:lvl2pPr algn="ctr" marL="0" indent="0">
+              <a:buNone/>
+              <a:defRPr sz="1250" b="1">
+                <a:solidFill>
+                  <a:srgbClr val="5A6B75"/>
+                </a:solidFill>
+                <a:latin typeface="Yu Gothic"/>
+                <a:ea typeface="Yu Gothic"/>
+                <a:cs typeface="Yu Gothic"/>
+              </a:defRPr>
+            </a:lvl2pPr>
+            <a:lvl3pPr algn="ctr" marL="0" indent="0">
+              <a:buNone/>
+              <a:defRPr sz="1050" b="1">
+                <a:solidFill>
+                  <a:srgbClr val="5A6B75"/>
+                </a:solidFill>
+                <a:latin typeface="Yu Gothic"/>
+                <a:ea typeface="Yu Gothic"/>
+                <a:cs typeface="Yu Gothic"/>
+              </a:defRPr>
+            </a:lvl3pPr>
+            <a:lvl4pPr algn="ctr" marL="0" indent="0">
+              <a:buNone/>
+              <a:defRPr sz="900" b="1">
+                <a:solidFill>
+                  <a:srgbClr val="5A6B75"/>
+                </a:solidFill>
+                <a:latin typeface="Yu Gothic"/>
+                <a:ea typeface="Yu Gothic"/>
+                <a:cs typeface="Yu Gothic"/>
+              </a:defRPr>
+            </a:lvl4pPr>
           </a:lstStyle>
           <a:p>
             <a:r>
@@ -1699,6 +1968,39 @@
                 <a:cs typeface="Yu Gothic"/>
               </a:defRPr>
             </a:lvl1pPr>
+            <a:lvl2pPr algn="ctr" marL="0" indent="0">
+              <a:buNone/>
+              <a:defRPr sz="1050" b="0">
+                <a:solidFill>
+                  <a:srgbClr val="1A1A1A"/>
+                </a:solidFill>
+                <a:latin typeface="Yu Gothic"/>
+                <a:ea typeface="Yu Gothic"/>
+                <a:cs typeface="Yu Gothic"/>
+              </a:defRPr>
+            </a:lvl2pPr>
+            <a:lvl3pPr algn="ctr" marL="0" indent="0">
+              <a:buNone/>
+              <a:defRPr sz="900" b="0">
+                <a:solidFill>
+                  <a:srgbClr val="1A1A1A"/>
+                </a:solidFill>
+                <a:latin typeface="Yu Gothic"/>
+                <a:ea typeface="Yu Gothic"/>
+                <a:cs typeface="Yu Gothic"/>
+              </a:defRPr>
+            </a:lvl3pPr>
+            <a:lvl4pPr algn="ctr" marL="0" indent="0">
+              <a:buNone/>
+              <a:defRPr sz="750" b="0">
+                <a:solidFill>
+                  <a:srgbClr val="1A1A1A"/>
+                </a:solidFill>
+                <a:latin typeface="Yu Gothic"/>
+                <a:ea typeface="Yu Gothic"/>
+                <a:cs typeface="Yu Gothic"/>
+              </a:defRPr>
+            </a:lvl4pPr>
           </a:lstStyle>
           <a:p>
             <a:r>
@@ -2105,6 +2407,28 @@
                 <a:cs typeface="Yu Gothic"/>
               </a:defRPr>
             </a:lvl1pPr>
+            <a:lvl2pPr algn="ctr" marL="0" indent="0">
+              <a:buNone/>
+              <a:defRPr sz="1950" b="1">
+                <a:solidFill>
+                  <a:srgbClr val="FFFFFF"/>
+                </a:solidFill>
+                <a:latin typeface="Yu Gothic"/>
+                <a:ea typeface="Yu Gothic"/>
+                <a:cs typeface="Yu Gothic"/>
+              </a:defRPr>
+            </a:lvl2pPr>
+            <a:lvl3pPr algn="ctr" marL="0" indent="0">
+              <a:buNone/>
+              <a:defRPr sz="1650" b="1">
+                <a:solidFill>
+                  <a:srgbClr val="FFFFFF"/>
+                </a:solidFill>
+                <a:latin typeface="Yu Gothic"/>
+                <a:ea typeface="Yu Gothic"/>
+                <a:cs typeface="Yu Gothic"/>
+              </a:defRPr>
+            </a:lvl3pPr>
           </a:lstStyle>
           <a:p>
             <a:r>
@@ -2144,6 +2468,39 @@
                 <a:cs typeface="Yu Gothic"/>
               </a:defRPr>
             </a:lvl1pPr>
+            <a:lvl2pPr algn="l" marL="0" indent="0">
+              <a:buNone/>
+              <a:defRPr sz="1600" b="1">
+                <a:solidFill>
+                  <a:srgbClr val="0A5A87"/>
+                </a:solidFill>
+                <a:latin typeface="Yu Gothic"/>
+                <a:ea typeface="Yu Gothic"/>
+                <a:cs typeface="Yu Gothic"/>
+              </a:defRPr>
+            </a:lvl2pPr>
+            <a:lvl3pPr algn="l" marL="0" indent="0">
+              <a:buNone/>
+              <a:defRPr sz="1350" b="1">
+                <a:solidFill>
+                  <a:srgbClr val="0A5A87"/>
+                </a:solidFill>
+                <a:latin typeface="Yu Gothic"/>
+                <a:ea typeface="Yu Gothic"/>
+                <a:cs typeface="Yu Gothic"/>
+              </a:defRPr>
+            </a:lvl3pPr>
+            <a:lvl4pPr algn="l" marL="0" indent="0">
+              <a:buNone/>
+              <a:defRPr sz="1150" b="1">
+                <a:solidFill>
+                  <a:srgbClr val="0A5A87"/>
+                </a:solidFill>
+                <a:latin typeface="Yu Gothic"/>
+                <a:ea typeface="Yu Gothic"/>
+                <a:cs typeface="Yu Gothic"/>
+              </a:defRPr>
+            </a:lvl4pPr>
           </a:lstStyle>
           <a:p>
             <a:r>
@@ -2183,6 +2540,39 @@
                 <a:cs typeface="Yu Gothic"/>
               </a:defRPr>
             </a:lvl1pPr>
+            <a:lvl2pPr algn="l" marL="0" indent="0">
+              <a:buNone/>
+              <a:defRPr sz="1250" b="0">
+                <a:solidFill>
+                  <a:srgbClr val="1A1A1A"/>
+                </a:solidFill>
+                <a:latin typeface="Yu Gothic"/>
+                <a:ea typeface="Yu Gothic"/>
+                <a:cs typeface="Yu Gothic"/>
+              </a:defRPr>
+            </a:lvl2pPr>
+            <a:lvl3pPr algn="l" marL="0" indent="0">
+              <a:buNone/>
+              <a:defRPr sz="1050" b="0">
+                <a:solidFill>
+                  <a:srgbClr val="1A1A1A"/>
+                </a:solidFill>
+                <a:latin typeface="Yu Gothic"/>
+                <a:ea typeface="Yu Gothic"/>
+                <a:cs typeface="Yu Gothic"/>
+              </a:defRPr>
+            </a:lvl3pPr>
+            <a:lvl4pPr algn="l" marL="0" indent="0">
+              <a:buNone/>
+              <a:defRPr sz="900" b="0">
+                <a:solidFill>
+                  <a:srgbClr val="1A1A1A"/>
+                </a:solidFill>
+                <a:latin typeface="Yu Gothic"/>
+                <a:ea typeface="Yu Gothic"/>
+                <a:cs typeface="Yu Gothic"/>
+              </a:defRPr>
+            </a:lvl4pPr>
           </a:lstStyle>
           <a:p>
             <a:r>
@@ -2222,6 +2612,28 @@
                 <a:cs typeface="Yu Gothic"/>
               </a:defRPr>
             </a:lvl1pPr>
+            <a:lvl2pPr algn="ctr" marL="0" indent="0">
+              <a:buNone/>
+              <a:defRPr sz="1950" b="1">
+                <a:solidFill>
+                  <a:srgbClr val="FFFFFF"/>
+                </a:solidFill>
+                <a:latin typeface="Yu Gothic"/>
+                <a:ea typeface="Yu Gothic"/>
+                <a:cs typeface="Yu Gothic"/>
+              </a:defRPr>
+            </a:lvl2pPr>
+            <a:lvl3pPr algn="ctr" marL="0" indent="0">
+              <a:buNone/>
+              <a:defRPr sz="1650" b="1">
+                <a:solidFill>
+                  <a:srgbClr val="FFFFFF"/>
+                </a:solidFill>
+                <a:latin typeface="Yu Gothic"/>
+                <a:ea typeface="Yu Gothic"/>
+                <a:cs typeface="Yu Gothic"/>
+              </a:defRPr>
+            </a:lvl3pPr>
           </a:lstStyle>
           <a:p>
             <a:r>
@@ -2261,6 +2673,39 @@
                 <a:cs typeface="Yu Gothic"/>
               </a:defRPr>
             </a:lvl1pPr>
+            <a:lvl2pPr algn="l" marL="0" indent="0">
+              <a:buNone/>
+              <a:defRPr sz="1600" b="1">
+                <a:solidFill>
+                  <a:srgbClr val="0A5A87"/>
+                </a:solidFill>
+                <a:latin typeface="Yu Gothic"/>
+                <a:ea typeface="Yu Gothic"/>
+                <a:cs typeface="Yu Gothic"/>
+              </a:defRPr>
+            </a:lvl2pPr>
+            <a:lvl3pPr algn="l" marL="0" indent="0">
+              <a:buNone/>
+              <a:defRPr sz="1350" b="1">
+                <a:solidFill>
+                  <a:srgbClr val="0A5A87"/>
+                </a:solidFill>
+                <a:latin typeface="Yu Gothic"/>
+                <a:ea typeface="Yu Gothic"/>
+                <a:cs typeface="Yu Gothic"/>
+              </a:defRPr>
+            </a:lvl3pPr>
+            <a:lvl4pPr algn="l" marL="0" indent="0">
+              <a:buNone/>
+              <a:defRPr sz="1150" b="1">
+                <a:solidFill>
+                  <a:srgbClr val="0A5A87"/>
+                </a:solidFill>
+                <a:latin typeface="Yu Gothic"/>
+                <a:ea typeface="Yu Gothic"/>
+                <a:cs typeface="Yu Gothic"/>
+              </a:defRPr>
+            </a:lvl4pPr>
           </a:lstStyle>
           <a:p>
             <a:r>
@@ -2300,6 +2745,39 @@
                 <a:cs typeface="Yu Gothic"/>
               </a:defRPr>
             </a:lvl1pPr>
+            <a:lvl2pPr algn="l" marL="0" indent="0">
+              <a:buNone/>
+              <a:defRPr sz="1250" b="0">
+                <a:solidFill>
+                  <a:srgbClr val="1A1A1A"/>
+                </a:solidFill>
+                <a:latin typeface="Yu Gothic"/>
+                <a:ea typeface="Yu Gothic"/>
+                <a:cs typeface="Yu Gothic"/>
+              </a:defRPr>
+            </a:lvl2pPr>
+            <a:lvl3pPr algn="l" marL="0" indent="0">
+              <a:buNone/>
+              <a:defRPr sz="1050" b="0">
+                <a:solidFill>
+                  <a:srgbClr val="1A1A1A"/>
+                </a:solidFill>
+                <a:latin typeface="Yu Gothic"/>
+                <a:ea typeface="Yu Gothic"/>
+                <a:cs typeface="Yu Gothic"/>
+              </a:defRPr>
+            </a:lvl3pPr>
+            <a:lvl4pPr algn="l" marL="0" indent="0">
+              <a:buNone/>
+              <a:defRPr sz="900" b="0">
+                <a:solidFill>
+                  <a:srgbClr val="1A1A1A"/>
+                </a:solidFill>
+                <a:latin typeface="Yu Gothic"/>
+                <a:ea typeface="Yu Gothic"/>
+                <a:cs typeface="Yu Gothic"/>
+              </a:defRPr>
+            </a:lvl4pPr>
           </a:lstStyle>
           <a:p>
             <a:r>
@@ -2339,6 +2817,28 @@
                 <a:cs typeface="Yu Gothic"/>
               </a:defRPr>
             </a:lvl1pPr>
+            <a:lvl2pPr algn="ctr" marL="0" indent="0">
+              <a:buNone/>
+              <a:defRPr sz="1950" b="1">
+                <a:solidFill>
+                  <a:srgbClr val="FFFFFF"/>
+                </a:solidFill>
+                <a:latin typeface="Yu Gothic"/>
+                <a:ea typeface="Yu Gothic"/>
+                <a:cs typeface="Yu Gothic"/>
+              </a:defRPr>
+            </a:lvl2pPr>
+            <a:lvl3pPr algn="ctr" marL="0" indent="0">
+              <a:buNone/>
+              <a:defRPr sz="1650" b="1">
+                <a:solidFill>
+                  <a:srgbClr val="FFFFFF"/>
+                </a:solidFill>
+                <a:latin typeface="Yu Gothic"/>
+                <a:ea typeface="Yu Gothic"/>
+                <a:cs typeface="Yu Gothic"/>
+              </a:defRPr>
+            </a:lvl3pPr>
           </a:lstStyle>
           <a:p>
             <a:r>
@@ -2378,6 +2878,39 @@
                 <a:cs typeface="Yu Gothic"/>
               </a:defRPr>
             </a:lvl1pPr>
+            <a:lvl2pPr algn="l" marL="0" indent="0">
+              <a:buNone/>
+              <a:defRPr sz="1600" b="1">
+                <a:solidFill>
+                  <a:srgbClr val="0A5A87"/>
+                </a:solidFill>
+                <a:latin typeface="Yu Gothic"/>
+                <a:ea typeface="Yu Gothic"/>
+                <a:cs typeface="Yu Gothic"/>
+              </a:defRPr>
+            </a:lvl2pPr>
+            <a:lvl3pPr algn="l" marL="0" indent="0">
+              <a:buNone/>
+              <a:defRPr sz="1350" b="1">
+                <a:solidFill>
+                  <a:srgbClr val="0A5A87"/>
+                </a:solidFill>
+                <a:latin typeface="Yu Gothic"/>
+                <a:ea typeface="Yu Gothic"/>
+                <a:cs typeface="Yu Gothic"/>
+              </a:defRPr>
+            </a:lvl3pPr>
+            <a:lvl4pPr algn="l" marL="0" indent="0">
+              <a:buNone/>
+              <a:defRPr sz="1150" b="1">
+                <a:solidFill>
+                  <a:srgbClr val="0A5A87"/>
+                </a:solidFill>
+                <a:latin typeface="Yu Gothic"/>
+                <a:ea typeface="Yu Gothic"/>
+                <a:cs typeface="Yu Gothic"/>
+              </a:defRPr>
+            </a:lvl4pPr>
           </a:lstStyle>
           <a:p>
             <a:r>
@@ -2417,6 +2950,39 @@
                 <a:cs typeface="Yu Gothic"/>
               </a:defRPr>
             </a:lvl1pPr>
+            <a:lvl2pPr algn="l" marL="0" indent="0">
+              <a:buNone/>
+              <a:defRPr sz="1250" b="0">
+                <a:solidFill>
+                  <a:srgbClr val="1A1A1A"/>
+                </a:solidFill>
+                <a:latin typeface="Yu Gothic"/>
+                <a:ea typeface="Yu Gothic"/>
+                <a:cs typeface="Yu Gothic"/>
+              </a:defRPr>
+            </a:lvl2pPr>
+            <a:lvl3pPr algn="l" marL="0" indent="0">
+              <a:buNone/>
+              <a:defRPr sz="1050" b="0">
+                <a:solidFill>
+                  <a:srgbClr val="1A1A1A"/>
+                </a:solidFill>
+                <a:latin typeface="Yu Gothic"/>
+                <a:ea typeface="Yu Gothic"/>
+                <a:cs typeface="Yu Gothic"/>
+              </a:defRPr>
+            </a:lvl3pPr>
+            <a:lvl4pPr algn="l" marL="0" indent="0">
+              <a:buNone/>
+              <a:defRPr sz="900" b="0">
+                <a:solidFill>
+                  <a:srgbClr val="1A1A1A"/>
+                </a:solidFill>
+                <a:latin typeface="Yu Gothic"/>
+                <a:ea typeface="Yu Gothic"/>
+                <a:cs typeface="Yu Gothic"/>
+              </a:defRPr>
+            </a:lvl4pPr>
           </a:lstStyle>
           <a:p>
             <a:r>
@@ -2841,6 +3407,39 @@
                 <a:cs typeface="Yu Gothic"/>
               </a:defRPr>
             </a:lvl1pPr>
+            <a:lvl2pPr algn="ctr" marL="0" indent="0">
+              <a:buNone/>
+              <a:defRPr sz="1050" b="1">
+                <a:solidFill>
+                  <a:srgbClr val="7FD4F5"/>
+                </a:solidFill>
+                <a:latin typeface="Yu Gothic"/>
+                <a:ea typeface="Yu Gothic"/>
+                <a:cs typeface="Yu Gothic"/>
+              </a:defRPr>
+            </a:lvl2pPr>
+            <a:lvl3pPr algn="ctr" marL="0" indent="0">
+              <a:buNone/>
+              <a:defRPr sz="900" b="1">
+                <a:solidFill>
+                  <a:srgbClr val="7FD4F5"/>
+                </a:solidFill>
+                <a:latin typeface="Yu Gothic"/>
+                <a:ea typeface="Yu Gothic"/>
+                <a:cs typeface="Yu Gothic"/>
+              </a:defRPr>
+            </a:lvl3pPr>
+            <a:lvl4pPr algn="ctr" marL="0" indent="0">
+              <a:buNone/>
+              <a:defRPr sz="750" b="1">
+                <a:solidFill>
+                  <a:srgbClr val="7FD4F5"/>
+                </a:solidFill>
+                <a:latin typeface="Yu Gothic"/>
+                <a:ea typeface="Yu Gothic"/>
+                <a:cs typeface="Yu Gothic"/>
+              </a:defRPr>
+            </a:lvl4pPr>
           </a:lstStyle>
           <a:p>
             <a:r>
@@ -2880,6 +3479,39 @@
                 <a:cs typeface="Yu Gothic"/>
               </a:defRPr>
             </a:lvl1pPr>
+            <a:lvl2pPr algn="ctr" marL="0" indent="0">
+              <a:buNone/>
+              <a:defRPr sz="1500" b="1">
+                <a:solidFill>
+                  <a:srgbClr val="FFFFFF"/>
+                </a:solidFill>
+                <a:latin typeface="Yu Gothic"/>
+                <a:ea typeface="Yu Gothic"/>
+                <a:cs typeface="Yu Gothic"/>
+              </a:defRPr>
+            </a:lvl2pPr>
+            <a:lvl3pPr algn="ctr" marL="0" indent="0">
+              <a:buNone/>
+              <a:defRPr sz="1300" b="1">
+                <a:solidFill>
+                  <a:srgbClr val="FFFFFF"/>
+                </a:solidFill>
+                <a:latin typeface="Yu Gothic"/>
+                <a:ea typeface="Yu Gothic"/>
+                <a:cs typeface="Yu Gothic"/>
+              </a:defRPr>
+            </a:lvl3pPr>
+            <a:lvl4pPr algn="ctr" marL="0" indent="0">
+              <a:buNone/>
+              <a:defRPr sz="1050" b="1">
+                <a:solidFill>
+                  <a:srgbClr val="FFFFFF"/>
+                </a:solidFill>
+                <a:latin typeface="Yu Gothic"/>
+                <a:ea typeface="Yu Gothic"/>
+                <a:cs typeface="Yu Gothic"/>
+              </a:defRPr>
+            </a:lvl4pPr>
           </a:lstStyle>
           <a:p>
             <a:r>
@@ -2919,6 +3551,39 @@
                 <a:cs typeface="Yu Gothic"/>
               </a:defRPr>
             </a:lvl1pPr>
+            <a:lvl2pPr algn="ctr" marL="0" indent="0">
+              <a:buNone/>
+              <a:defRPr sz="950" b="0">
+                <a:solidFill>
+                  <a:srgbClr val="E8F4FA"/>
+                </a:solidFill>
+                <a:latin typeface="Yu Gothic"/>
+                <a:ea typeface="Yu Gothic"/>
+                <a:cs typeface="Yu Gothic"/>
+              </a:defRPr>
+            </a:lvl2pPr>
+            <a:lvl3pPr algn="ctr" marL="0" indent="0">
+              <a:buNone/>
+              <a:defRPr sz="850" b="0">
+                <a:solidFill>
+                  <a:srgbClr val="E8F4FA"/>
+                </a:solidFill>
+                <a:latin typeface="Yu Gothic"/>
+                <a:ea typeface="Yu Gothic"/>
+                <a:cs typeface="Yu Gothic"/>
+              </a:defRPr>
+            </a:lvl3pPr>
+            <a:lvl4pPr algn="ctr" marL="0" indent="0">
+              <a:buNone/>
+              <a:defRPr sz="700" b="0">
+                <a:solidFill>
+                  <a:srgbClr val="E8F4FA"/>
+                </a:solidFill>
+                <a:latin typeface="Yu Gothic"/>
+                <a:ea typeface="Yu Gothic"/>
+                <a:cs typeface="Yu Gothic"/>
+              </a:defRPr>
+            </a:lvl4pPr>
           </a:lstStyle>
           <a:p>
             <a:r>
@@ -2958,6 +3623,39 @@
                 <a:cs typeface="Yu Gothic"/>
               </a:defRPr>
             </a:lvl1pPr>
+            <a:lvl2pPr algn="ctr" marL="0" indent="0">
+              <a:buNone/>
+              <a:defRPr sz="1050" b="1">
+                <a:solidFill>
+                  <a:srgbClr val="7FD4F5"/>
+                </a:solidFill>
+                <a:latin typeface="Yu Gothic"/>
+                <a:ea typeface="Yu Gothic"/>
+                <a:cs typeface="Yu Gothic"/>
+              </a:defRPr>
+            </a:lvl2pPr>
+            <a:lvl3pPr algn="ctr" marL="0" indent="0">
+              <a:buNone/>
+              <a:defRPr sz="900" b="1">
+                <a:solidFill>
+                  <a:srgbClr val="7FD4F5"/>
+                </a:solidFill>
+                <a:latin typeface="Yu Gothic"/>
+                <a:ea typeface="Yu Gothic"/>
+                <a:cs typeface="Yu Gothic"/>
+              </a:defRPr>
+            </a:lvl3pPr>
+            <a:lvl4pPr algn="ctr" marL="0" indent="0">
+              <a:buNone/>
+              <a:defRPr sz="750" b="1">
+                <a:solidFill>
+                  <a:srgbClr val="7FD4F5"/>
+                </a:solidFill>
+                <a:latin typeface="Yu Gothic"/>
+                <a:ea typeface="Yu Gothic"/>
+                <a:cs typeface="Yu Gothic"/>
+              </a:defRPr>
+            </a:lvl4pPr>
           </a:lstStyle>
           <a:p>
             <a:r>
@@ -2997,6 +3695,39 @@
                 <a:cs typeface="Yu Gothic"/>
               </a:defRPr>
             </a:lvl1pPr>
+            <a:lvl2pPr algn="ctr" marL="0" indent="0">
+              <a:buNone/>
+              <a:defRPr sz="1500" b="1">
+                <a:solidFill>
+                  <a:srgbClr val="FFFFFF"/>
+                </a:solidFill>
+                <a:latin typeface="Yu Gothic"/>
+                <a:ea typeface="Yu Gothic"/>
+                <a:cs typeface="Yu Gothic"/>
+              </a:defRPr>
+            </a:lvl2pPr>
+            <a:lvl3pPr algn="ctr" marL="0" indent="0">
+              <a:buNone/>
+              <a:defRPr sz="1300" b="1">
+                <a:solidFill>
+                  <a:srgbClr val="FFFFFF"/>
+                </a:solidFill>
+                <a:latin typeface="Yu Gothic"/>
+                <a:ea typeface="Yu Gothic"/>
+                <a:cs typeface="Yu Gothic"/>
+              </a:defRPr>
+            </a:lvl3pPr>
+            <a:lvl4pPr algn="ctr" marL="0" indent="0">
+              <a:buNone/>
+              <a:defRPr sz="1050" b="1">
+                <a:solidFill>
+                  <a:srgbClr val="FFFFFF"/>
+                </a:solidFill>
+                <a:latin typeface="Yu Gothic"/>
+                <a:ea typeface="Yu Gothic"/>
+                <a:cs typeface="Yu Gothic"/>
+              </a:defRPr>
+            </a:lvl4pPr>
           </a:lstStyle>
           <a:p>
             <a:r>
@@ -3036,6 +3767,39 @@
                 <a:cs typeface="Yu Gothic"/>
               </a:defRPr>
             </a:lvl1pPr>
+            <a:lvl2pPr algn="ctr" marL="0" indent="0">
+              <a:buNone/>
+              <a:defRPr sz="950" b="0">
+                <a:solidFill>
+                  <a:srgbClr val="E8F4FA"/>
+                </a:solidFill>
+                <a:latin typeface="Yu Gothic"/>
+                <a:ea typeface="Yu Gothic"/>
+                <a:cs typeface="Yu Gothic"/>
+              </a:defRPr>
+            </a:lvl2pPr>
+            <a:lvl3pPr algn="ctr" marL="0" indent="0">
+              <a:buNone/>
+              <a:defRPr sz="850" b="0">
+                <a:solidFill>
+                  <a:srgbClr val="E8F4FA"/>
+                </a:solidFill>
+                <a:latin typeface="Yu Gothic"/>
+                <a:ea typeface="Yu Gothic"/>
+                <a:cs typeface="Yu Gothic"/>
+              </a:defRPr>
+            </a:lvl3pPr>
+            <a:lvl4pPr algn="ctr" marL="0" indent="0">
+              <a:buNone/>
+              <a:defRPr sz="700" b="0">
+                <a:solidFill>
+                  <a:srgbClr val="E8F4FA"/>
+                </a:solidFill>
+                <a:latin typeface="Yu Gothic"/>
+                <a:ea typeface="Yu Gothic"/>
+                <a:cs typeface="Yu Gothic"/>
+              </a:defRPr>
+            </a:lvl4pPr>
           </a:lstStyle>
           <a:p>
             <a:r>
@@ -3075,6 +3839,39 @@
                 <a:cs typeface="Yu Gothic"/>
               </a:defRPr>
             </a:lvl1pPr>
+            <a:lvl2pPr algn="ctr" marL="0" indent="0">
+              <a:buNone/>
+              <a:defRPr sz="1050" b="1">
+                <a:solidFill>
+                  <a:srgbClr val="7FD4F5"/>
+                </a:solidFill>
+                <a:latin typeface="Yu Gothic"/>
+                <a:ea typeface="Yu Gothic"/>
+                <a:cs typeface="Yu Gothic"/>
+              </a:defRPr>
+            </a:lvl2pPr>
+            <a:lvl3pPr algn="ctr" marL="0" indent="0">
+              <a:buNone/>
+              <a:defRPr sz="900" b="1">
+                <a:solidFill>
+                  <a:srgbClr val="7FD4F5"/>
+                </a:solidFill>
+                <a:latin typeface="Yu Gothic"/>
+                <a:ea typeface="Yu Gothic"/>
+                <a:cs typeface="Yu Gothic"/>
+              </a:defRPr>
+            </a:lvl3pPr>
+            <a:lvl4pPr algn="ctr" marL="0" indent="0">
+              <a:buNone/>
+              <a:defRPr sz="750" b="1">
+                <a:solidFill>
+                  <a:srgbClr val="7FD4F5"/>
+                </a:solidFill>
+                <a:latin typeface="Yu Gothic"/>
+                <a:ea typeface="Yu Gothic"/>
+                <a:cs typeface="Yu Gothic"/>
+              </a:defRPr>
+            </a:lvl4pPr>
           </a:lstStyle>
           <a:p>
             <a:r>
@@ -3114,6 +3911,39 @@
                 <a:cs typeface="Yu Gothic"/>
               </a:defRPr>
             </a:lvl1pPr>
+            <a:lvl2pPr algn="ctr" marL="0" indent="0">
+              <a:buNone/>
+              <a:defRPr sz="1500" b="1">
+                <a:solidFill>
+                  <a:srgbClr val="FFFFFF"/>
+                </a:solidFill>
+                <a:latin typeface="Yu Gothic"/>
+                <a:ea typeface="Yu Gothic"/>
+                <a:cs typeface="Yu Gothic"/>
+              </a:defRPr>
+            </a:lvl2pPr>
+            <a:lvl3pPr algn="ctr" marL="0" indent="0">
+              <a:buNone/>
+              <a:defRPr sz="1300" b="1">
+                <a:solidFill>
+                  <a:srgbClr val="FFFFFF"/>
+                </a:solidFill>
+                <a:latin typeface="Yu Gothic"/>
+                <a:ea typeface="Yu Gothic"/>
+                <a:cs typeface="Yu Gothic"/>
+              </a:defRPr>
+            </a:lvl3pPr>
+            <a:lvl4pPr algn="ctr" marL="0" indent="0">
+              <a:buNone/>
+              <a:defRPr sz="1050" b="1">
+                <a:solidFill>
+                  <a:srgbClr val="FFFFFF"/>
+                </a:solidFill>
+                <a:latin typeface="Yu Gothic"/>
+                <a:ea typeface="Yu Gothic"/>
+                <a:cs typeface="Yu Gothic"/>
+              </a:defRPr>
+            </a:lvl4pPr>
           </a:lstStyle>
           <a:p>
             <a:r>
@@ -3153,6 +3983,39 @@
                 <a:cs typeface="Yu Gothic"/>
               </a:defRPr>
             </a:lvl1pPr>
+            <a:lvl2pPr algn="ctr" marL="0" indent="0">
+              <a:buNone/>
+              <a:defRPr sz="950" b="0">
+                <a:solidFill>
+                  <a:srgbClr val="E8F4FA"/>
+                </a:solidFill>
+                <a:latin typeface="Yu Gothic"/>
+                <a:ea typeface="Yu Gothic"/>
+                <a:cs typeface="Yu Gothic"/>
+              </a:defRPr>
+            </a:lvl2pPr>
+            <a:lvl3pPr algn="ctr" marL="0" indent="0">
+              <a:buNone/>
+              <a:defRPr sz="850" b="0">
+                <a:solidFill>
+                  <a:srgbClr val="E8F4FA"/>
+                </a:solidFill>
+                <a:latin typeface="Yu Gothic"/>
+                <a:ea typeface="Yu Gothic"/>
+                <a:cs typeface="Yu Gothic"/>
+              </a:defRPr>
+            </a:lvl3pPr>
+            <a:lvl4pPr algn="ctr" marL="0" indent="0">
+              <a:buNone/>
+              <a:defRPr sz="700" b="0">
+                <a:solidFill>
+                  <a:srgbClr val="E8F4FA"/>
+                </a:solidFill>
+                <a:latin typeface="Yu Gothic"/>
+                <a:ea typeface="Yu Gothic"/>
+                <a:cs typeface="Yu Gothic"/>
+              </a:defRPr>
+            </a:lvl4pPr>
           </a:lstStyle>
           <a:p>
             <a:r>
@@ -3192,6 +4055,39 @@
                 <a:cs typeface="Yu Gothic"/>
               </a:defRPr>
             </a:lvl1pPr>
+            <a:lvl2pPr algn="ctr" marL="0" indent="0">
+              <a:buNone/>
+              <a:defRPr sz="1050" b="1">
+                <a:solidFill>
+                  <a:srgbClr val="7FD4F5"/>
+                </a:solidFill>
+                <a:latin typeface="Yu Gothic"/>
+                <a:ea typeface="Yu Gothic"/>
+                <a:cs typeface="Yu Gothic"/>
+              </a:defRPr>
+            </a:lvl2pPr>
+            <a:lvl3pPr algn="ctr" marL="0" indent="0">
+              <a:buNone/>
+              <a:defRPr sz="900" b="1">
+                <a:solidFill>
+                  <a:srgbClr val="7FD4F5"/>
+                </a:solidFill>
+                <a:latin typeface="Yu Gothic"/>
+                <a:ea typeface="Yu Gothic"/>
+                <a:cs typeface="Yu Gothic"/>
+              </a:defRPr>
+            </a:lvl3pPr>
+            <a:lvl4pPr algn="ctr" marL="0" indent="0">
+              <a:buNone/>
+              <a:defRPr sz="750" b="1">
+                <a:solidFill>
+                  <a:srgbClr val="7FD4F5"/>
+                </a:solidFill>
+                <a:latin typeface="Yu Gothic"/>
+                <a:ea typeface="Yu Gothic"/>
+                <a:cs typeface="Yu Gothic"/>
+              </a:defRPr>
+            </a:lvl4pPr>
           </a:lstStyle>
           <a:p>
             <a:r>
@@ -3231,6 +4127,39 @@
                 <a:cs typeface="Yu Gothic"/>
               </a:defRPr>
             </a:lvl1pPr>
+            <a:lvl2pPr algn="ctr" marL="0" indent="0">
+              <a:buNone/>
+              <a:defRPr sz="1500" b="1">
+                <a:solidFill>
+                  <a:srgbClr val="FFFFFF"/>
+                </a:solidFill>
+                <a:latin typeface="Yu Gothic"/>
+                <a:ea typeface="Yu Gothic"/>
+                <a:cs typeface="Yu Gothic"/>
+              </a:defRPr>
+            </a:lvl2pPr>
+            <a:lvl3pPr algn="ctr" marL="0" indent="0">
+              <a:buNone/>
+              <a:defRPr sz="1300" b="1">
+                <a:solidFill>
+                  <a:srgbClr val="FFFFFF"/>
+                </a:solidFill>
+                <a:latin typeface="Yu Gothic"/>
+                <a:ea typeface="Yu Gothic"/>
+                <a:cs typeface="Yu Gothic"/>
+              </a:defRPr>
+            </a:lvl3pPr>
+            <a:lvl4pPr algn="ctr" marL="0" indent="0">
+              <a:buNone/>
+              <a:defRPr sz="1050" b="1">
+                <a:solidFill>
+                  <a:srgbClr val="FFFFFF"/>
+                </a:solidFill>
+                <a:latin typeface="Yu Gothic"/>
+                <a:ea typeface="Yu Gothic"/>
+                <a:cs typeface="Yu Gothic"/>
+              </a:defRPr>
+            </a:lvl4pPr>
           </a:lstStyle>
           <a:p>
             <a:r>
@@ -3270,6 +4199,39 @@
                 <a:cs typeface="Yu Gothic"/>
               </a:defRPr>
             </a:lvl1pPr>
+            <a:lvl2pPr algn="ctr" marL="0" indent="0">
+              <a:buNone/>
+              <a:defRPr sz="950" b="0">
+                <a:solidFill>
+                  <a:srgbClr val="E8F4FA"/>
+                </a:solidFill>
+                <a:latin typeface="Yu Gothic"/>
+                <a:ea typeface="Yu Gothic"/>
+                <a:cs typeface="Yu Gothic"/>
+              </a:defRPr>
+            </a:lvl2pPr>
+            <a:lvl3pPr algn="ctr" marL="0" indent="0">
+              <a:buNone/>
+              <a:defRPr sz="850" b="0">
+                <a:solidFill>
+                  <a:srgbClr val="E8F4FA"/>
+                </a:solidFill>
+                <a:latin typeface="Yu Gothic"/>
+                <a:ea typeface="Yu Gothic"/>
+                <a:cs typeface="Yu Gothic"/>
+              </a:defRPr>
+            </a:lvl3pPr>
+            <a:lvl4pPr algn="ctr" marL="0" indent="0">
+              <a:buNone/>
+              <a:defRPr sz="700" b="0">
+                <a:solidFill>
+                  <a:srgbClr val="E8F4FA"/>
+                </a:solidFill>
+                <a:latin typeface="Yu Gothic"/>
+                <a:ea typeface="Yu Gothic"/>
+                <a:cs typeface="Yu Gothic"/>
+              </a:defRPr>
+            </a:lvl4pPr>
           </a:lstStyle>
           <a:p>
             <a:r>
@@ -3654,6 +4616,39 @@
                 <a:cs typeface="Yu Gothic"/>
               </a:defRPr>
             </a:lvl1pPr>
+            <a:lvl2pPr algn="l" marL="0" indent="0">
+              <a:buNone/>
+              <a:defRPr sz="1400" b="1">
+                <a:solidFill>
+                  <a:srgbClr val="FFFFFF"/>
+                </a:solidFill>
+                <a:latin typeface="Yu Gothic"/>
+                <a:ea typeface="Yu Gothic"/>
+                <a:cs typeface="Yu Gothic"/>
+              </a:defRPr>
+            </a:lvl2pPr>
+            <a:lvl3pPr algn="l" marL="0" indent="0">
+              <a:buNone/>
+              <a:defRPr sz="1200" b="1">
+                <a:solidFill>
+                  <a:srgbClr val="FFFFFF"/>
+                </a:solidFill>
+                <a:latin typeface="Yu Gothic"/>
+                <a:ea typeface="Yu Gothic"/>
+                <a:cs typeface="Yu Gothic"/>
+              </a:defRPr>
+            </a:lvl3pPr>
+            <a:lvl4pPr algn="l" marL="0" indent="0">
+              <a:buNone/>
+              <a:defRPr sz="1000" b="1">
+                <a:solidFill>
+                  <a:srgbClr val="FFFFFF"/>
+                </a:solidFill>
+                <a:latin typeface="Yu Gothic"/>
+                <a:ea typeface="Yu Gothic"/>
+                <a:cs typeface="Yu Gothic"/>
+              </a:defRPr>
+            </a:lvl4pPr>
           </a:lstStyle>
           <a:p>
             <a:r>
@@ -3693,6 +4688,39 @@
                 <a:cs typeface="Yu Gothic"/>
               </a:defRPr>
             </a:lvl1pPr>
+            <a:lvl2pPr algn="l" marL="0" indent="0">
+              <a:buNone/>
+              <a:defRPr sz="1250" b="0">
+                <a:solidFill>
+                  <a:srgbClr val="1A1A1A"/>
+                </a:solidFill>
+                <a:latin typeface="Yu Gothic"/>
+                <a:ea typeface="Yu Gothic"/>
+                <a:cs typeface="Yu Gothic"/>
+              </a:defRPr>
+            </a:lvl2pPr>
+            <a:lvl3pPr algn="l" marL="0" indent="0">
+              <a:buNone/>
+              <a:defRPr sz="1050" b="0">
+                <a:solidFill>
+                  <a:srgbClr val="1A1A1A"/>
+                </a:solidFill>
+                <a:latin typeface="Yu Gothic"/>
+                <a:ea typeface="Yu Gothic"/>
+                <a:cs typeface="Yu Gothic"/>
+              </a:defRPr>
+            </a:lvl3pPr>
+            <a:lvl4pPr algn="l" marL="0" indent="0">
+              <a:buNone/>
+              <a:defRPr sz="900" b="0">
+                <a:solidFill>
+                  <a:srgbClr val="1A1A1A"/>
+                </a:solidFill>
+                <a:latin typeface="Yu Gothic"/>
+                <a:ea typeface="Yu Gothic"/>
+                <a:cs typeface="Yu Gothic"/>
+              </a:defRPr>
+            </a:lvl4pPr>
           </a:lstStyle>
           <a:p>
             <a:r>
@@ -3732,6 +4760,39 @@
                 <a:cs typeface="Yu Gothic"/>
               </a:defRPr>
             </a:lvl1pPr>
+            <a:lvl2pPr algn="l" marL="0" indent="0">
+              <a:buNone/>
+              <a:defRPr sz="1400" b="1">
+                <a:solidFill>
+                  <a:srgbClr val="FFFFFF"/>
+                </a:solidFill>
+                <a:latin typeface="Yu Gothic"/>
+                <a:ea typeface="Yu Gothic"/>
+                <a:cs typeface="Yu Gothic"/>
+              </a:defRPr>
+            </a:lvl2pPr>
+            <a:lvl3pPr algn="l" marL="0" indent="0">
+              <a:buNone/>
+              <a:defRPr sz="1200" b="1">
+                <a:solidFill>
+                  <a:srgbClr val="FFFFFF"/>
+                </a:solidFill>
+                <a:latin typeface="Yu Gothic"/>
+                <a:ea typeface="Yu Gothic"/>
+                <a:cs typeface="Yu Gothic"/>
+              </a:defRPr>
+            </a:lvl3pPr>
+            <a:lvl4pPr algn="l" marL="0" indent="0">
+              <a:buNone/>
+              <a:defRPr sz="1000" b="1">
+                <a:solidFill>
+                  <a:srgbClr val="FFFFFF"/>
+                </a:solidFill>
+                <a:latin typeface="Yu Gothic"/>
+                <a:ea typeface="Yu Gothic"/>
+                <a:cs typeface="Yu Gothic"/>
+              </a:defRPr>
+            </a:lvl4pPr>
           </a:lstStyle>
           <a:p>
             <a:r>
@@ -3771,6 +4832,39 @@
                 <a:cs typeface="Yu Gothic"/>
               </a:defRPr>
             </a:lvl1pPr>
+            <a:lvl2pPr algn="l" marL="0" indent="0">
+              <a:buNone/>
+              <a:defRPr sz="1250" b="0">
+                <a:solidFill>
+                  <a:srgbClr val="1A1A1A"/>
+                </a:solidFill>
+                <a:latin typeface="Yu Gothic"/>
+                <a:ea typeface="Yu Gothic"/>
+                <a:cs typeface="Yu Gothic"/>
+              </a:defRPr>
+            </a:lvl2pPr>
+            <a:lvl3pPr algn="l" marL="0" indent="0">
+              <a:buNone/>
+              <a:defRPr sz="1050" b="0">
+                <a:solidFill>
+                  <a:srgbClr val="1A1A1A"/>
+                </a:solidFill>
+                <a:latin typeface="Yu Gothic"/>
+                <a:ea typeface="Yu Gothic"/>
+                <a:cs typeface="Yu Gothic"/>
+              </a:defRPr>
+            </a:lvl3pPr>
+            <a:lvl4pPr algn="l" marL="0" indent="0">
+              <a:buNone/>
+              <a:defRPr sz="900" b="0">
+                <a:solidFill>
+                  <a:srgbClr val="1A1A1A"/>
+                </a:solidFill>
+                <a:latin typeface="Yu Gothic"/>
+                <a:ea typeface="Yu Gothic"/>
+                <a:cs typeface="Yu Gothic"/>
+              </a:defRPr>
+            </a:lvl4pPr>
           </a:lstStyle>
           <a:p>
             <a:r>
@@ -3922,6 +5016,27 @@
                 </a:solidFill>
               </a:defRPr>
             </a:lvl1pPr>
+            <a:lvl2pPr algn="l">
+              <a:defRPr sz="1400" b="0">
+                <a:solidFill>
+                  <a:srgbClr val="1A1A1A"/>
+                </a:solidFill>
+              </a:defRPr>
+            </a:lvl2pPr>
+            <a:lvl3pPr algn="l">
+              <a:defRPr sz="1200" b="0">
+                <a:solidFill>
+                  <a:srgbClr val="1A1A1A"/>
+                </a:solidFill>
+              </a:defRPr>
+            </a:lvl3pPr>
+            <a:lvl4pPr algn="l">
+              <a:defRPr sz="1000" b="0">
+                <a:solidFill>
+                  <a:srgbClr val="1A1A1A"/>
+                </a:solidFill>
+              </a:defRPr>
+            </a:lvl4pPr>
           </a:lstStyle>
           <a:p>
             <a:pPr lvl="0"/>
@@ -4475,28 +5590,28 @@
           <a:bodyPr anchor="t"/>
           <a:lstStyle>
             <a:lvl2pPr>
-              <a:defRPr sz="2400"/>
+              <a:defRPr sz="1150"/>
             </a:lvl2pPr>
             <a:lvl3pPr>
-              <a:defRPr sz="2000"/>
+              <a:defRPr sz="950"/>
             </a:lvl3pPr>
             <a:lvl4pPr>
-              <a:defRPr sz="1800"/>
+              <a:defRPr sz="850"/>
             </a:lvl4pPr>
             <a:lvl5pPr>
-              <a:defRPr sz="1800"/>
+              <a:defRPr sz="850"/>
             </a:lvl5pPr>
             <a:lvl6pPr>
-              <a:defRPr sz="1800"/>
+              <a:defRPr sz="850"/>
             </a:lvl6pPr>
             <a:lvl7pPr>
-              <a:defRPr sz="1800"/>
+              <a:defRPr sz="850"/>
             </a:lvl7pPr>
             <a:lvl8pPr>
-              <a:defRPr sz="1800"/>
+              <a:defRPr sz="850"/>
             </a:lvl8pPr>
             <a:lvl9pPr>
-              <a:defRPr sz="1800"/>
+              <a:defRPr sz="850"/>
             </a:lvl9pPr>
             <a:lvl1pPr algn="l">
               <a:defRPr sz="1500" b="0">
@@ -4564,28 +5679,28 @@
           <a:bodyPr anchor="t"/>
           <a:lstStyle>
             <a:lvl2pPr>
-              <a:defRPr sz="2400"/>
+              <a:defRPr sz="1150"/>
             </a:lvl2pPr>
             <a:lvl3pPr>
-              <a:defRPr sz="2000"/>
+              <a:defRPr sz="950"/>
             </a:lvl3pPr>
             <a:lvl4pPr>
-              <a:defRPr sz="1800"/>
+              <a:defRPr sz="850"/>
             </a:lvl4pPr>
             <a:lvl5pPr>
-              <a:defRPr sz="1800"/>
+              <a:defRPr sz="850"/>
             </a:lvl5pPr>
             <a:lvl6pPr>
-              <a:defRPr sz="1800"/>
+              <a:defRPr sz="850"/>
             </a:lvl6pPr>
             <a:lvl7pPr>
-              <a:defRPr sz="1800"/>
+              <a:defRPr sz="850"/>
             </a:lvl7pPr>
             <a:lvl8pPr>
-              <a:defRPr sz="1800"/>
+              <a:defRPr sz="850"/>
             </a:lvl8pPr>
             <a:lvl9pPr>
-              <a:defRPr sz="1800"/>
+              <a:defRPr sz="850"/>
             </a:lvl9pPr>
             <a:lvl1pPr algn="l">
               <a:defRPr sz="1500" b="0">
@@ -4894,11 +6009,11 @@
           <a:lstStyle>
             <a:lvl2pPr marL="457200" indent="0">
               <a:buNone/>
-              <a:defRPr sz="2000" b="1"/>
+              <a:defRPr sz="1000" b="1"/>
             </a:lvl2pPr>
             <a:lvl3pPr marL="914400" indent="0">
               <a:buNone/>
-              <a:defRPr sz="1800" b="1"/>
+              <a:defRPr sz="900" b="1"/>
             </a:lvl3pPr>
             <a:lvl4pPr marL="1371600" indent="0">
               <a:buNone/>
@@ -4962,28 +6077,28 @@
           <a:bodyPr anchor="t"/>
           <a:lstStyle>
             <a:lvl2pPr>
-              <a:defRPr sz="2000"/>
+              <a:defRPr sz="950"/>
             </a:lvl2pPr>
             <a:lvl3pPr>
-              <a:defRPr sz="1800"/>
+              <a:defRPr sz="850"/>
             </a:lvl3pPr>
             <a:lvl4pPr>
-              <a:defRPr sz="1600"/>
+              <a:defRPr sz="750"/>
             </a:lvl4pPr>
             <a:lvl5pPr>
-              <a:defRPr sz="1600"/>
+              <a:defRPr sz="750"/>
             </a:lvl5pPr>
             <a:lvl6pPr>
-              <a:defRPr sz="1600"/>
+              <a:defRPr sz="750"/>
             </a:lvl6pPr>
             <a:lvl7pPr>
-              <a:defRPr sz="1600"/>
+              <a:defRPr sz="750"/>
             </a:lvl7pPr>
             <a:lvl8pPr>
-              <a:defRPr sz="1600"/>
+              <a:defRPr sz="750"/>
             </a:lvl8pPr>
             <a:lvl9pPr>
-              <a:defRPr sz="1600"/>
+              <a:defRPr sz="750"/>
             </a:lvl9pPr>
             <a:lvl1pPr algn="l">
               <a:defRPr sz="1500" b="0">
@@ -5052,35 +6167,35 @@
           <a:lstStyle>
             <a:lvl2pPr marL="457200" indent="0">
               <a:buNone/>
-              <a:defRPr sz="2000" b="1"/>
+              <a:defRPr sz="100" b="1"/>
             </a:lvl2pPr>
             <a:lvl3pPr marL="914400" indent="0">
               <a:buNone/>
-              <a:defRPr sz="1800" b="1"/>
+              <a:defRPr sz="100" b="1"/>
             </a:lvl3pPr>
             <a:lvl4pPr marL="1371600" indent="0">
               <a:buNone/>
-              <a:defRPr sz="1600" b="1"/>
+              <a:defRPr sz="100" b="1"/>
             </a:lvl4pPr>
             <a:lvl5pPr marL="1828800" indent="0">
               <a:buNone/>
-              <a:defRPr sz="1600" b="1"/>
+              <a:defRPr sz="100" b="1"/>
             </a:lvl5pPr>
             <a:lvl6pPr marL="2286000" indent="0">
               <a:buNone/>
-              <a:defRPr sz="1600" b="1"/>
+              <a:defRPr sz="100" b="1"/>
             </a:lvl6pPr>
             <a:lvl7pPr marL="2743200" indent="0">
               <a:buNone/>
-              <a:defRPr sz="1600" b="1"/>
+              <a:defRPr sz="100" b="1"/>
             </a:lvl7pPr>
             <a:lvl8pPr marL="3200400" indent="0">
               <a:buNone/>
-              <a:defRPr sz="1600" b="1"/>
+              <a:defRPr sz="100" b="1"/>
             </a:lvl8pPr>
             <a:lvl9pPr marL="3657600" indent="0">
               <a:buNone/>
-              <a:defRPr sz="1600" b="1"/>
+              <a:defRPr sz="100" b="1"/>
             </a:lvl9pPr>
             <a:lvl1pPr algn="l" indent="0" marL="0">
               <a:buNone/>
@@ -5120,28 +6235,28 @@
           <a:bodyPr anchor="t"/>
           <a:lstStyle>
             <a:lvl2pPr>
-              <a:defRPr sz="2000"/>
+              <a:defRPr sz="900"/>
             </a:lvl2pPr>
             <a:lvl3pPr>
-              <a:defRPr sz="1800"/>
+              <a:defRPr sz="800"/>
             </a:lvl3pPr>
             <a:lvl4pPr>
-              <a:defRPr sz="1600"/>
+              <a:defRPr sz="700"/>
             </a:lvl4pPr>
             <a:lvl5pPr>
-              <a:defRPr sz="1600"/>
+              <a:defRPr sz="700"/>
             </a:lvl5pPr>
             <a:lvl6pPr>
-              <a:defRPr sz="1600"/>
+              <a:defRPr sz="700"/>
             </a:lvl6pPr>
             <a:lvl7pPr>
-              <a:defRPr sz="1600"/>
+              <a:defRPr sz="700"/>
             </a:lvl7pPr>
             <a:lvl8pPr>
-              <a:defRPr sz="1600"/>
+              <a:defRPr sz="700"/>
             </a:lvl8pPr>
             <a:lvl9pPr>
-              <a:defRPr sz="1600"/>
+              <a:defRPr sz="700"/>
             </a:lvl9pPr>
             <a:lvl1pPr algn="l">
               <a:defRPr sz="1400" b="0">
@@ -5464,6 +6579,36 @@
                 <a:ea typeface="Yu Gothic"/>
               </a:defRPr>
             </a:lvl1pPr>
+            <a:lvl2pPr algn="l" marL="0" indent="0">
+              <a:buNone/>
+              <a:defRPr sz="900" b="0" i="1">
+                <a:solidFill>
+                  <a:srgbClr val="5A6B75"/>
+                </a:solidFill>
+                <a:latin typeface="Yu Gothic"/>
+                <a:ea typeface="Yu Gothic"/>
+              </a:defRPr>
+            </a:lvl2pPr>
+            <a:lvl3pPr algn="l" marL="0" indent="0">
+              <a:buNone/>
+              <a:defRPr sz="750" b="0" i="1">
+                <a:solidFill>
+                  <a:srgbClr val="5A6B75"/>
+                </a:solidFill>
+                <a:latin typeface="Yu Gothic"/>
+                <a:ea typeface="Yu Gothic"/>
+              </a:defRPr>
+            </a:lvl3pPr>
+            <a:lvl4pPr algn="l" marL="0" indent="0">
+              <a:buNone/>
+              <a:defRPr sz="650" b="0" i="1">
+                <a:solidFill>
+                  <a:srgbClr val="5A6B75"/>
+                </a:solidFill>
+                <a:latin typeface="Yu Gothic"/>
+                <a:ea typeface="Yu Gothic"/>
+              </a:defRPr>
+            </a:lvl4pPr>
           </a:lstStyle>
           <a:p>
             <a:r>
